--- a/沒有可給你.pptx
+++ b/沒有可給你.pptx
@@ -297,7 +297,7 @@
             <a:fld id="{DA4C6294-B03A-42B5-B352-89C3C204C0FC}" type="datetimeFigureOut">
               <a:rPr lang="zh-TW" altLang="en-US" smtClean="0"/>
               <a:pPr/>
-              <a:t>2018/6/16</a:t>
+              <a:t>2024/2/27</a:t>
             </a:fld>
             <a:endParaRPr lang="zh-TW" altLang="en-US"/>
           </a:p>
@@ -464,7 +464,7 @@
             <a:fld id="{DA4C6294-B03A-42B5-B352-89C3C204C0FC}" type="datetimeFigureOut">
               <a:rPr lang="zh-TW" altLang="en-US" smtClean="0"/>
               <a:pPr/>
-              <a:t>2018/6/16</a:t>
+              <a:t>2024/2/27</a:t>
             </a:fld>
             <a:endParaRPr lang="zh-TW" altLang="en-US"/>
           </a:p>
@@ -641,7 +641,7 @@
             <a:fld id="{DA4C6294-B03A-42B5-B352-89C3C204C0FC}" type="datetimeFigureOut">
               <a:rPr lang="zh-TW" altLang="en-US" smtClean="0"/>
               <a:pPr/>
-              <a:t>2018/6/16</a:t>
+              <a:t>2024/2/27</a:t>
             </a:fld>
             <a:endParaRPr lang="zh-TW" altLang="en-US"/>
           </a:p>
@@ -808,7 +808,7 @@
             <a:fld id="{DA4C6294-B03A-42B5-B352-89C3C204C0FC}" type="datetimeFigureOut">
               <a:rPr lang="zh-TW" altLang="en-US" smtClean="0"/>
               <a:pPr/>
-              <a:t>2018/6/16</a:t>
+              <a:t>2024/2/27</a:t>
             </a:fld>
             <a:endParaRPr lang="zh-TW" altLang="en-US"/>
           </a:p>
@@ -1051,7 +1051,7 @@
             <a:fld id="{DA4C6294-B03A-42B5-B352-89C3C204C0FC}" type="datetimeFigureOut">
               <a:rPr lang="zh-TW" altLang="en-US" smtClean="0"/>
               <a:pPr/>
-              <a:t>2018/6/16</a:t>
+              <a:t>2024/2/27</a:t>
             </a:fld>
             <a:endParaRPr lang="zh-TW" altLang="en-US"/>
           </a:p>
@@ -1336,7 +1336,7 @@
             <a:fld id="{DA4C6294-B03A-42B5-B352-89C3C204C0FC}" type="datetimeFigureOut">
               <a:rPr lang="zh-TW" altLang="en-US" smtClean="0"/>
               <a:pPr/>
-              <a:t>2018/6/16</a:t>
+              <a:t>2024/2/27</a:t>
             </a:fld>
             <a:endParaRPr lang="zh-TW" altLang="en-US"/>
           </a:p>
@@ -1755,7 +1755,7 @@
             <a:fld id="{DA4C6294-B03A-42B5-B352-89C3C204C0FC}" type="datetimeFigureOut">
               <a:rPr lang="zh-TW" altLang="en-US" smtClean="0"/>
               <a:pPr/>
-              <a:t>2018/6/16</a:t>
+              <a:t>2024/2/27</a:t>
             </a:fld>
             <a:endParaRPr lang="zh-TW" altLang="en-US"/>
           </a:p>
@@ -1870,7 +1870,7 @@
             <a:fld id="{DA4C6294-B03A-42B5-B352-89C3C204C0FC}" type="datetimeFigureOut">
               <a:rPr lang="zh-TW" altLang="en-US" smtClean="0"/>
               <a:pPr/>
-              <a:t>2018/6/16</a:t>
+              <a:t>2024/2/27</a:t>
             </a:fld>
             <a:endParaRPr lang="zh-TW" altLang="en-US"/>
           </a:p>
@@ -1962,7 +1962,7 @@
             <a:fld id="{DA4C6294-B03A-42B5-B352-89C3C204C0FC}" type="datetimeFigureOut">
               <a:rPr lang="zh-TW" altLang="en-US" smtClean="0"/>
               <a:pPr/>
-              <a:t>2018/6/16</a:t>
+              <a:t>2024/2/27</a:t>
             </a:fld>
             <a:endParaRPr lang="zh-TW" altLang="en-US"/>
           </a:p>
@@ -2236,7 +2236,7 @@
             <a:fld id="{DA4C6294-B03A-42B5-B352-89C3C204C0FC}" type="datetimeFigureOut">
               <a:rPr lang="zh-TW" altLang="en-US" smtClean="0"/>
               <a:pPr/>
-              <a:t>2018/6/16</a:t>
+              <a:t>2024/2/27</a:t>
             </a:fld>
             <a:endParaRPr lang="zh-TW" altLang="en-US"/>
           </a:p>
@@ -2490,7 +2490,7 @@
             <a:fld id="{DA4C6294-B03A-42B5-B352-89C3C204C0FC}" type="datetimeFigureOut">
               <a:rPr lang="zh-TW" altLang="en-US" smtClean="0"/>
               <a:pPr/>
-              <a:t>2018/6/16</a:t>
+              <a:t>2024/2/27</a:t>
             </a:fld>
             <a:endParaRPr lang="zh-TW" altLang="en-US"/>
           </a:p>
@@ -2705,7 +2705,7 @@
             <a:fld id="{DA4C6294-B03A-42B5-B352-89C3C204C0FC}" type="datetimeFigureOut">
               <a:rPr lang="zh-TW" altLang="en-US" smtClean="0"/>
               <a:pPr/>
-              <a:t>2018/6/16</a:t>
+              <a:t>2024/2/27</a:t>
             </a:fld>
             <a:endParaRPr lang="zh-TW" altLang="en-US"/>
           </a:p>
@@ -4017,9 +4017,14 @@
 <p:sld xmlns:a="http://schemas.openxmlformats.org/drawingml/2006/main" xmlns:r="http://schemas.openxmlformats.org/officeDocument/2006/relationships" xmlns:p="http://schemas.openxmlformats.org/presentationml/2006/main">
   <p:cSld>
     <p:bg>
-      <p:bgRef idx="1001">
-        <a:schemeClr val="bg1"/>
-      </p:bgRef>
+      <p:bgPr>
+        <a:blipFill dpi="0" rotWithShape="1">
+          <a:blip r:embed="rId3"/>
+          <a:srcRect/>
+          <a:tile tx="0" ty="0" sx="100000" sy="100000" flip="none" algn="tl"/>
+        </a:blipFill>
+        <a:effectLst/>
+      </p:bgPr>
     </p:bg>
     <p:spTree>
       <p:nvGrpSpPr>
@@ -4185,6 +4190,16 @@
 <file path=ppt/slides/slide8.xml><?xml version="1.0" encoding="utf-8"?>
 <p:sld xmlns:a="http://schemas.openxmlformats.org/drawingml/2006/main" xmlns:r="http://schemas.openxmlformats.org/officeDocument/2006/relationships" xmlns:p="http://schemas.openxmlformats.org/presentationml/2006/main">
   <p:cSld>
+    <p:bg>
+      <p:bgPr>
+        <a:blipFill dpi="0" rotWithShape="1">
+          <a:blip r:embed="rId3"/>
+          <a:srcRect/>
+          <a:tile tx="0" ty="0" sx="100000" sy="100000" flip="none" algn="tl"/>
+        </a:blipFill>
+        <a:effectLst/>
+      </p:bgPr>
+    </p:bg>
     <p:spTree>
       <p:nvGrpSpPr>
         <p:cNvPr id="1" name=""/>
@@ -4360,7 +4375,7 @@
     </p:spTree>
   </p:cSld>
   <p:clrMapOvr>
-    <a:masterClrMapping/>
+    <a:overrideClrMapping bg1="lt1" tx1="dk1" bg2="lt2" tx2="dk2" accent1="accent1" accent2="accent2" accent3="accent3" accent4="accent4" accent5="accent5" accent6="accent6" hlink="hlink" folHlink="folHlink"/>
   </p:clrMapOvr>
 </p:sld>
 </file>
@@ -4368,6 +4383,16 @@
 <file path=ppt/slides/slide9.xml><?xml version="1.0" encoding="utf-8"?>
 <p:sld xmlns:a="http://schemas.openxmlformats.org/drawingml/2006/main" xmlns:r="http://schemas.openxmlformats.org/officeDocument/2006/relationships" xmlns:p="http://schemas.openxmlformats.org/presentationml/2006/main">
   <p:cSld>
+    <p:bg>
+      <p:bgPr>
+        <a:blipFill dpi="0" rotWithShape="1">
+          <a:blip r:embed="rId3"/>
+          <a:srcRect/>
+          <a:tile tx="0" ty="0" sx="100000" sy="100000" flip="none" algn="tl"/>
+        </a:blipFill>
+        <a:effectLst/>
+      </p:bgPr>
+    </p:bg>
     <p:spTree>
       <p:nvGrpSpPr>
         <p:cNvPr id="1" name=""/>
@@ -4471,7 +4496,7 @@
     </p:spTree>
   </p:cSld>
   <p:clrMapOvr>
-    <a:masterClrMapping/>
+    <a:overrideClrMapping bg1="lt1" tx1="dk1" bg2="lt2" tx2="dk2" accent1="accent1" accent2="accent2" accent3="accent3" accent4="accent4" accent5="accent5" accent6="accent6" hlink="hlink" folHlink="folHlink"/>
   </p:clrMapOvr>
 </p:sld>
 </file>
@@ -4757,4 +4782,133 @@
   <a:objectDefaults/>
   <a:extraClrSchemeLst/>
 </a:theme>
+</file>
+
+<file path=ppt/theme/themeOverride1.xml><?xml version="1.0" encoding="utf-8"?>
+<a:themeOverride xmlns:a="http://schemas.openxmlformats.org/drawingml/2006/main">
+  <a:clrScheme name="Office">
+    <a:dk1>
+      <a:sysClr val="windowText" lastClr="000000"/>
+    </a:dk1>
+    <a:lt1>
+      <a:sysClr val="window" lastClr="FFFFFF"/>
+    </a:lt1>
+    <a:dk2>
+      <a:srgbClr val="1F497D"/>
+    </a:dk2>
+    <a:lt2>
+      <a:srgbClr val="EEECE1"/>
+    </a:lt2>
+    <a:accent1>
+      <a:srgbClr val="4F81BD"/>
+    </a:accent1>
+    <a:accent2>
+      <a:srgbClr val="C0504D"/>
+    </a:accent2>
+    <a:accent3>
+      <a:srgbClr val="9BBB59"/>
+    </a:accent3>
+    <a:accent4>
+      <a:srgbClr val="8064A2"/>
+    </a:accent4>
+    <a:accent5>
+      <a:srgbClr val="4BACC6"/>
+    </a:accent5>
+    <a:accent6>
+      <a:srgbClr val="F79646"/>
+    </a:accent6>
+    <a:hlink>
+      <a:srgbClr val="0000FF"/>
+    </a:hlink>
+    <a:folHlink>
+      <a:srgbClr val="800080"/>
+    </a:folHlink>
+  </a:clrScheme>
+</a:themeOverride>
+</file>
+
+<file path=ppt/theme/themeOverride2.xml><?xml version="1.0" encoding="utf-8"?>
+<a:themeOverride xmlns:a="http://schemas.openxmlformats.org/drawingml/2006/main">
+  <a:clrScheme name="Office">
+    <a:dk1>
+      <a:sysClr val="windowText" lastClr="000000"/>
+    </a:dk1>
+    <a:lt1>
+      <a:sysClr val="window" lastClr="FFFFFF"/>
+    </a:lt1>
+    <a:dk2>
+      <a:srgbClr val="1F497D"/>
+    </a:dk2>
+    <a:lt2>
+      <a:srgbClr val="EEECE1"/>
+    </a:lt2>
+    <a:accent1>
+      <a:srgbClr val="4F81BD"/>
+    </a:accent1>
+    <a:accent2>
+      <a:srgbClr val="C0504D"/>
+    </a:accent2>
+    <a:accent3>
+      <a:srgbClr val="9BBB59"/>
+    </a:accent3>
+    <a:accent4>
+      <a:srgbClr val="8064A2"/>
+    </a:accent4>
+    <a:accent5>
+      <a:srgbClr val="4BACC6"/>
+    </a:accent5>
+    <a:accent6>
+      <a:srgbClr val="F79646"/>
+    </a:accent6>
+    <a:hlink>
+      <a:srgbClr val="0000FF"/>
+    </a:hlink>
+    <a:folHlink>
+      <a:srgbClr val="800080"/>
+    </a:folHlink>
+  </a:clrScheme>
+</a:themeOverride>
+</file>
+
+<file path=ppt/theme/themeOverride3.xml><?xml version="1.0" encoding="utf-8"?>
+<a:themeOverride xmlns:a="http://schemas.openxmlformats.org/drawingml/2006/main">
+  <a:clrScheme name="Office">
+    <a:dk1>
+      <a:sysClr val="windowText" lastClr="000000"/>
+    </a:dk1>
+    <a:lt1>
+      <a:sysClr val="window" lastClr="FFFFFF"/>
+    </a:lt1>
+    <a:dk2>
+      <a:srgbClr val="1F497D"/>
+    </a:dk2>
+    <a:lt2>
+      <a:srgbClr val="EEECE1"/>
+    </a:lt2>
+    <a:accent1>
+      <a:srgbClr val="4F81BD"/>
+    </a:accent1>
+    <a:accent2>
+      <a:srgbClr val="C0504D"/>
+    </a:accent2>
+    <a:accent3>
+      <a:srgbClr val="9BBB59"/>
+    </a:accent3>
+    <a:accent4>
+      <a:srgbClr val="8064A2"/>
+    </a:accent4>
+    <a:accent5>
+      <a:srgbClr val="4BACC6"/>
+    </a:accent5>
+    <a:accent6>
+      <a:srgbClr val="F79646"/>
+    </a:accent6>
+    <a:hlink>
+      <a:srgbClr val="0000FF"/>
+    </a:hlink>
+    <a:folHlink>
+      <a:srgbClr val="800080"/>
+    </a:folHlink>
+  </a:clrScheme>
+</a:themeOverride>
 </file>